--- a/Mes impots en ligne/Mes_impots_en_ligne_Yggdrasil.pptx
+++ b/Mes impots en ligne/Mes_impots_en_ligne_Yggdrasil.pptx
@@ -2414,7 +2414,7 @@
           <a:noFill/>
           <a:extLst>
             <a:ext uri="{909E8E84-426E-40dd-AFC4-6F175D3DCCD1}">
-              <a14:hiddenFill xmlns:a14="http://schemas.microsoft.com/office/drawing/2010/main" xmlns="">
+              <a14:hiddenFill xmlns="" xmlns:a14="http://schemas.microsoft.com/office/drawing/2010/main">
                 <a:solidFill>
                   <a:srgbClr val="FFFFFF"/>
                 </a:solidFill>
@@ -2474,7 +2474,7 @@
             </a:ln>
             <a:extLst>
               <a:ext uri="{91240B29-F687-4f45-9708-019B960494DF}">
-                <a14:hiddenLine xmlns:a14="http://schemas.microsoft.com/office/drawing/2010/main" xmlns="" w="9525">
+                <a14:hiddenLine xmlns="" xmlns:a14="http://schemas.microsoft.com/office/drawing/2010/main" w="9525">
                   <a:solidFill>
                     <a:srgbClr val="000000"/>
                   </a:solidFill>
@@ -2564,7 +2564,7 @@
             </a:ln>
             <a:extLst>
               <a:ext uri="{91240B29-F687-4f45-9708-019B960494DF}">
-                <a14:hiddenLine xmlns:a14="http://schemas.microsoft.com/office/drawing/2010/main" xmlns="" w="9525">
+                <a14:hiddenLine xmlns="" xmlns:a14="http://schemas.microsoft.com/office/drawing/2010/main" w="9525">
                   <a:solidFill>
                     <a:srgbClr val="000000"/>
                   </a:solidFill>
@@ -2654,7 +2654,7 @@
             </a:ln>
             <a:extLst>
               <a:ext uri="{91240B29-F687-4f45-9708-019B960494DF}">
-                <a14:hiddenLine xmlns:a14="http://schemas.microsoft.com/office/drawing/2010/main" xmlns="" w="9525">
+                <a14:hiddenLine xmlns="" xmlns:a14="http://schemas.microsoft.com/office/drawing/2010/main" w="9525">
                   <a:solidFill>
                     <a:srgbClr val="000000"/>
                   </a:solidFill>
@@ -2688,7 +2688,7 @@
             </a:ln>
             <a:extLst>
               <a:ext uri="{91240B29-F687-4f45-9708-019B960494DF}">
-                <a14:hiddenLine xmlns:a14="http://schemas.microsoft.com/office/drawing/2010/main" xmlns="" w="9525">
+                <a14:hiddenLine xmlns="" xmlns:a14="http://schemas.microsoft.com/office/drawing/2010/main" w="9525">
                   <a:solidFill>
                     <a:srgbClr val="000000"/>
                   </a:solidFill>
@@ -2778,7 +2778,7 @@
             </a:ln>
             <a:extLst>
               <a:ext uri="{91240B29-F687-4f45-9708-019B960494DF}">
-                <a14:hiddenLine xmlns:a14="http://schemas.microsoft.com/office/drawing/2010/main" xmlns="" w="9525">
+                <a14:hiddenLine xmlns="" xmlns:a14="http://schemas.microsoft.com/office/drawing/2010/main" w="9525">
                   <a:solidFill>
                     <a:srgbClr val="000000"/>
                   </a:solidFill>
@@ -2840,7 +2840,7 @@
             </a:ln>
             <a:extLst>
               <a:ext uri="{91240B29-F687-4f45-9708-019B960494DF}">
-                <a14:hiddenLine xmlns:a14="http://schemas.microsoft.com/office/drawing/2010/main" xmlns="" w="9525">
+                <a14:hiddenLine xmlns="" xmlns:a14="http://schemas.microsoft.com/office/drawing/2010/main" w="9525">
                   <a:solidFill>
                     <a:srgbClr val="000000"/>
                   </a:solidFill>
@@ -2902,7 +2902,7 @@
             </a:ln>
             <a:extLst>
               <a:ext uri="{91240B29-F687-4f45-9708-019B960494DF}">
-                <a14:hiddenLine xmlns:a14="http://schemas.microsoft.com/office/drawing/2010/main" xmlns="" w="9525">
+                <a14:hiddenLine xmlns="" xmlns:a14="http://schemas.microsoft.com/office/drawing/2010/main" w="9525">
                   <a:solidFill>
                     <a:srgbClr val="000000"/>
                   </a:solidFill>
@@ -2992,7 +2992,7 @@
             </a:ln>
             <a:extLst>
               <a:ext uri="{91240B29-F687-4f45-9708-019B960494DF}">
-                <a14:hiddenLine xmlns:a14="http://schemas.microsoft.com/office/drawing/2010/main" xmlns="" w="9525">
+                <a14:hiddenLine xmlns="" xmlns:a14="http://schemas.microsoft.com/office/drawing/2010/main" w="9525">
                   <a:solidFill>
                     <a:srgbClr val="000000"/>
                   </a:solidFill>
@@ -3054,7 +3054,7 @@
             </a:ln>
             <a:extLst>
               <a:ext uri="{91240B29-F687-4f45-9708-019B960494DF}">
-                <a14:hiddenLine xmlns:a14="http://schemas.microsoft.com/office/drawing/2010/main" xmlns="" w="9525">
+                <a14:hiddenLine xmlns="" xmlns:a14="http://schemas.microsoft.com/office/drawing/2010/main" w="9525">
                   <a:solidFill>
                     <a:srgbClr val="000000"/>
                   </a:solidFill>
@@ -3116,7 +3116,7 @@
             </a:ln>
             <a:extLst>
               <a:ext uri="{91240B29-F687-4f45-9708-019B960494DF}">
-                <a14:hiddenLine xmlns:a14="http://schemas.microsoft.com/office/drawing/2010/main" xmlns="" w="9525">
+                <a14:hiddenLine xmlns="" xmlns:a14="http://schemas.microsoft.com/office/drawing/2010/main" w="9525">
                   <a:solidFill>
                     <a:srgbClr val="000000"/>
                   </a:solidFill>
@@ -3206,7 +3206,7 @@
             </a:ln>
             <a:extLst>
               <a:ext uri="{91240B29-F687-4f45-9708-019B960494DF}">
-                <a14:hiddenLine xmlns:a14="http://schemas.microsoft.com/office/drawing/2010/main" xmlns="" w="9525">
+                <a14:hiddenLine xmlns="" xmlns:a14="http://schemas.microsoft.com/office/drawing/2010/main" w="9525">
                   <a:solidFill>
                     <a:srgbClr val="000000"/>
                   </a:solidFill>
@@ -3296,7 +3296,7 @@
             </a:ln>
             <a:extLst>
               <a:ext uri="{91240B29-F687-4f45-9708-019B960494DF}">
-                <a14:hiddenLine xmlns:a14="http://schemas.microsoft.com/office/drawing/2010/main" xmlns="" w="9525">
+                <a14:hiddenLine xmlns="" xmlns:a14="http://schemas.microsoft.com/office/drawing/2010/main" w="9525">
                   <a:solidFill>
                     <a:srgbClr val="000000"/>
                   </a:solidFill>
@@ -3358,7 +3358,7 @@
             </a:ln>
             <a:extLst>
               <a:ext uri="{91240B29-F687-4f45-9708-019B960494DF}">
-                <a14:hiddenLine xmlns:a14="http://schemas.microsoft.com/office/drawing/2010/main" xmlns="" w="9525">
+                <a14:hiddenLine xmlns="" xmlns:a14="http://schemas.microsoft.com/office/drawing/2010/main" w="9525">
                   <a:solidFill>
                     <a:srgbClr val="000000"/>
                   </a:solidFill>
@@ -3468,7 +3468,7 @@
             </a:ln>
             <a:extLst>
               <a:ext uri="{91240B29-F687-4f45-9708-019B960494DF}">
-                <a14:hiddenLine xmlns:a14="http://schemas.microsoft.com/office/drawing/2010/main" xmlns="" w="9525">
+                <a14:hiddenLine xmlns="" xmlns:a14="http://schemas.microsoft.com/office/drawing/2010/main" w="9525">
                   <a:solidFill>
                     <a:srgbClr val="000000"/>
                   </a:solidFill>
@@ -3530,7 +3530,7 @@
             </a:ln>
             <a:extLst>
               <a:ext uri="{91240B29-F687-4f45-9708-019B960494DF}">
-                <a14:hiddenLine xmlns:a14="http://schemas.microsoft.com/office/drawing/2010/main" xmlns="" w="9525">
+                <a14:hiddenLine xmlns="" xmlns:a14="http://schemas.microsoft.com/office/drawing/2010/main" w="9525">
                   <a:solidFill>
                     <a:srgbClr val="000000"/>
                   </a:solidFill>
@@ -3620,7 +3620,7 @@
             </a:ln>
             <a:extLst>
               <a:ext uri="{91240B29-F687-4f45-9708-019B960494DF}">
-                <a14:hiddenLine xmlns:a14="http://schemas.microsoft.com/office/drawing/2010/main" xmlns="" w="9525">
+                <a14:hiddenLine xmlns="" xmlns:a14="http://schemas.microsoft.com/office/drawing/2010/main" w="9525">
                   <a:solidFill>
                     <a:srgbClr val="000000"/>
                   </a:solidFill>
@@ -3710,7 +3710,7 @@
             </a:ln>
             <a:extLst>
               <a:ext uri="{91240B29-F687-4f45-9708-019B960494DF}">
-                <a14:hiddenLine xmlns:a14="http://schemas.microsoft.com/office/drawing/2010/main" xmlns="" w="9525">
+                <a14:hiddenLine xmlns="" xmlns:a14="http://schemas.microsoft.com/office/drawing/2010/main" w="9525">
                   <a:solidFill>
                     <a:srgbClr val="000000"/>
                   </a:solidFill>
@@ -3772,7 +3772,7 @@
             </a:ln>
             <a:extLst>
               <a:ext uri="{91240B29-F687-4f45-9708-019B960494DF}">
-                <a14:hiddenLine xmlns:a14="http://schemas.microsoft.com/office/drawing/2010/main" xmlns="" w="9525">
+                <a14:hiddenLine xmlns="" xmlns:a14="http://schemas.microsoft.com/office/drawing/2010/main" w="9525">
                   <a:solidFill>
                     <a:srgbClr val="000000"/>
                   </a:solidFill>
@@ -3862,7 +3862,7 @@
             </a:ln>
             <a:extLst>
               <a:ext uri="{91240B29-F687-4f45-9708-019B960494DF}">
-                <a14:hiddenLine xmlns:a14="http://schemas.microsoft.com/office/drawing/2010/main" xmlns="" w="9525">
+                <a14:hiddenLine xmlns="" xmlns:a14="http://schemas.microsoft.com/office/drawing/2010/main" w="9525">
                   <a:solidFill>
                     <a:srgbClr val="000000"/>
                   </a:solidFill>
@@ -3952,7 +3952,7 @@
             </a:ln>
             <a:extLst>
               <a:ext uri="{91240B29-F687-4f45-9708-019B960494DF}">
-                <a14:hiddenLine xmlns:a14="http://schemas.microsoft.com/office/drawing/2010/main" xmlns="" w="9525">
+                <a14:hiddenLine xmlns="" xmlns:a14="http://schemas.microsoft.com/office/drawing/2010/main" w="9525">
                   <a:solidFill>
                     <a:srgbClr val="000000"/>
                   </a:solidFill>
@@ -4008,7 +4008,7 @@
             </a:ln>
             <a:extLst>
               <a:ext uri="{91240B29-F687-4f45-9708-019B960494DF}">
-                <a14:hiddenLine xmlns:a14="http://schemas.microsoft.com/office/drawing/2010/main" xmlns="" w="9525">
+                <a14:hiddenLine xmlns="" xmlns:a14="http://schemas.microsoft.com/office/drawing/2010/main" w="9525">
                   <a:solidFill>
                     <a:srgbClr val="000000"/>
                   </a:solidFill>
@@ -4098,7 +4098,7 @@
             </a:ln>
             <a:extLst>
               <a:ext uri="{91240B29-F687-4f45-9708-019B960494DF}">
-                <a14:hiddenLine xmlns:a14="http://schemas.microsoft.com/office/drawing/2010/main" xmlns="" w="9525">
+                <a14:hiddenLine xmlns="" xmlns:a14="http://schemas.microsoft.com/office/drawing/2010/main" w="9525">
                   <a:solidFill>
                     <a:srgbClr val="000000"/>
                   </a:solidFill>
@@ -4154,7 +4154,7 @@
             </a:ln>
             <a:extLst>
               <a:ext uri="{91240B29-F687-4f45-9708-019B960494DF}">
-                <a14:hiddenLine xmlns:a14="http://schemas.microsoft.com/office/drawing/2010/main" xmlns="" w="9525">
+                <a14:hiddenLine xmlns="" xmlns:a14="http://schemas.microsoft.com/office/drawing/2010/main" w="9525">
                   <a:solidFill>
                     <a:srgbClr val="000000"/>
                   </a:solidFill>
@@ -4244,7 +4244,7 @@
             </a:ln>
             <a:extLst>
               <a:ext uri="{91240B29-F687-4f45-9708-019B960494DF}">
-                <a14:hiddenLine xmlns:a14="http://schemas.microsoft.com/office/drawing/2010/main" xmlns="" w="9525">
+                <a14:hiddenLine xmlns="" xmlns:a14="http://schemas.microsoft.com/office/drawing/2010/main" w="9525">
                   <a:solidFill>
                     <a:srgbClr val="000000"/>
                   </a:solidFill>
@@ -4312,7 +4312,7 @@
             </a:ln>
             <a:extLst>
               <a:ext uri="{91240B29-F687-4f45-9708-019B960494DF}">
-                <a14:hiddenLine xmlns:a14="http://schemas.microsoft.com/office/drawing/2010/main" xmlns="" w="9525">
+                <a14:hiddenLine xmlns="" xmlns:a14="http://schemas.microsoft.com/office/drawing/2010/main" w="9525">
                   <a:solidFill>
                     <a:srgbClr val="000000"/>
                   </a:solidFill>
@@ -4402,7 +4402,7 @@
             </a:ln>
             <a:extLst>
               <a:ext uri="{91240B29-F687-4f45-9708-019B960494DF}">
-                <a14:hiddenLine xmlns:a14="http://schemas.microsoft.com/office/drawing/2010/main" xmlns="" w="9525">
+                <a14:hiddenLine xmlns="" xmlns:a14="http://schemas.microsoft.com/office/drawing/2010/main" w="9525">
                   <a:solidFill>
                     <a:srgbClr val="000000"/>
                   </a:solidFill>
@@ -4470,7 +4470,7 @@
             </a:ln>
             <a:extLst>
               <a:ext uri="{91240B29-F687-4f45-9708-019B960494DF}">
-                <a14:hiddenLine xmlns:a14="http://schemas.microsoft.com/office/drawing/2010/main" xmlns="" w="9525">
+                <a14:hiddenLine xmlns="" xmlns:a14="http://schemas.microsoft.com/office/drawing/2010/main" w="9525">
                   <a:solidFill>
                     <a:srgbClr val="000000"/>
                   </a:solidFill>
@@ -4560,7 +4560,7 @@
             </a:ln>
             <a:extLst>
               <a:ext uri="{91240B29-F687-4f45-9708-019B960494DF}">
-                <a14:hiddenLine xmlns:a14="http://schemas.microsoft.com/office/drawing/2010/main" xmlns="" w="9525">
+                <a14:hiddenLine xmlns="" xmlns:a14="http://schemas.microsoft.com/office/drawing/2010/main" w="9525">
                   <a:solidFill>
                     <a:srgbClr val="000000"/>
                   </a:solidFill>
@@ -4594,7 +4594,7 @@
             </a:ln>
             <a:extLst>
               <a:ext uri="{91240B29-F687-4f45-9708-019B960494DF}">
-                <a14:hiddenLine xmlns:a14="http://schemas.microsoft.com/office/drawing/2010/main" xmlns="" w="9525">
+                <a14:hiddenLine xmlns="" xmlns:a14="http://schemas.microsoft.com/office/drawing/2010/main" w="9525">
                   <a:solidFill>
                     <a:srgbClr val="000000"/>
                   </a:solidFill>
@@ -4684,7 +4684,7 @@
             </a:ln>
             <a:extLst>
               <a:ext uri="{91240B29-F687-4f45-9708-019B960494DF}">
-                <a14:hiddenLine xmlns:a14="http://schemas.microsoft.com/office/drawing/2010/main" xmlns="" w="9525">
+                <a14:hiddenLine xmlns="" xmlns:a14="http://schemas.microsoft.com/office/drawing/2010/main" w="9525">
                   <a:solidFill>
                     <a:srgbClr val="000000"/>
                   </a:solidFill>
@@ -4746,7 +4746,7 @@
             </a:ln>
             <a:extLst>
               <a:ext uri="{91240B29-F687-4f45-9708-019B960494DF}">
-                <a14:hiddenLine xmlns:a14="http://schemas.microsoft.com/office/drawing/2010/main" xmlns="" w="9525">
+                <a14:hiddenLine xmlns="" xmlns:a14="http://schemas.microsoft.com/office/drawing/2010/main" w="9525">
                   <a:solidFill>
                     <a:srgbClr val="000000"/>
                   </a:solidFill>
@@ -4808,7 +4808,7 @@
             </a:ln>
             <a:extLst>
               <a:ext uri="{91240B29-F687-4f45-9708-019B960494DF}">
-                <a14:hiddenLine xmlns:a14="http://schemas.microsoft.com/office/drawing/2010/main" xmlns="" w="9525">
+                <a14:hiddenLine xmlns="" xmlns:a14="http://schemas.microsoft.com/office/drawing/2010/main" w="9525">
                   <a:solidFill>
                     <a:srgbClr val="000000"/>
                   </a:solidFill>
@@ -4898,7 +4898,7 @@
             </a:ln>
             <a:extLst>
               <a:ext uri="{91240B29-F687-4f45-9708-019B960494DF}">
-                <a14:hiddenLine xmlns:a14="http://schemas.microsoft.com/office/drawing/2010/main" xmlns="" w="9525">
+                <a14:hiddenLine xmlns="" xmlns:a14="http://schemas.microsoft.com/office/drawing/2010/main" w="9525">
                   <a:solidFill>
                     <a:srgbClr val="000000"/>
                   </a:solidFill>
@@ -4966,7 +4966,7 @@
             </a:ln>
             <a:extLst>
               <a:ext uri="{91240B29-F687-4f45-9708-019B960494DF}">
-                <a14:hiddenLine xmlns:a14="http://schemas.microsoft.com/office/drawing/2010/main" xmlns="" w="9525">
+                <a14:hiddenLine xmlns="" xmlns:a14="http://schemas.microsoft.com/office/drawing/2010/main" w="9525">
                   <a:solidFill>
                     <a:srgbClr val="000000"/>
                   </a:solidFill>
@@ -5028,7 +5028,7 @@
             </a:ln>
             <a:extLst>
               <a:ext uri="{91240B29-F687-4f45-9708-019B960494DF}">
-                <a14:hiddenLine xmlns:a14="http://schemas.microsoft.com/office/drawing/2010/main" xmlns="" w="9525">
+                <a14:hiddenLine xmlns="" xmlns:a14="http://schemas.microsoft.com/office/drawing/2010/main" w="9525">
                   <a:solidFill>
                     <a:srgbClr val="000000"/>
                   </a:solidFill>
@@ -5118,7 +5118,7 @@
             </a:ln>
             <a:extLst>
               <a:ext uri="{91240B29-F687-4f45-9708-019B960494DF}">
-                <a14:hiddenLine xmlns:a14="http://schemas.microsoft.com/office/drawing/2010/main" xmlns="" w="9525">
+                <a14:hiddenLine xmlns="" xmlns:a14="http://schemas.microsoft.com/office/drawing/2010/main" w="9525">
                   <a:solidFill>
                     <a:srgbClr val="000000"/>
                   </a:solidFill>
@@ -5180,7 +5180,7 @@
             </a:ln>
             <a:extLst>
               <a:ext uri="{91240B29-F687-4f45-9708-019B960494DF}">
-                <a14:hiddenLine xmlns:a14="http://schemas.microsoft.com/office/drawing/2010/main" xmlns="" w="9525">
+                <a14:hiddenLine xmlns="" xmlns:a14="http://schemas.microsoft.com/office/drawing/2010/main" w="9525">
                   <a:solidFill>
                     <a:srgbClr val="000000"/>
                   </a:solidFill>
@@ -5270,7 +5270,7 @@
             </a:ln>
             <a:extLst>
               <a:ext uri="{91240B29-F687-4f45-9708-019B960494DF}">
-                <a14:hiddenLine xmlns:a14="http://schemas.microsoft.com/office/drawing/2010/main" xmlns="" w="9525">
+                <a14:hiddenLine xmlns="" xmlns:a14="http://schemas.microsoft.com/office/drawing/2010/main" w="9525">
                   <a:solidFill>
                     <a:srgbClr val="000000"/>
                   </a:solidFill>
@@ -5332,7 +5332,7 @@
             </a:ln>
             <a:extLst>
               <a:ext uri="{91240B29-F687-4f45-9708-019B960494DF}">
-                <a14:hiddenLine xmlns:a14="http://schemas.microsoft.com/office/drawing/2010/main" xmlns="" w="9525">
+                <a14:hiddenLine xmlns="" xmlns:a14="http://schemas.microsoft.com/office/drawing/2010/main" w="9525">
                   <a:solidFill>
                     <a:srgbClr val="000000"/>
                   </a:solidFill>
@@ -5422,7 +5422,7 @@
             </a:ln>
             <a:extLst>
               <a:ext uri="{91240B29-F687-4f45-9708-019B960494DF}">
-                <a14:hiddenLine xmlns:a14="http://schemas.microsoft.com/office/drawing/2010/main" xmlns="" w="9525">
+                <a14:hiddenLine xmlns="" xmlns:a14="http://schemas.microsoft.com/office/drawing/2010/main" w="9525">
                   <a:solidFill>
                     <a:srgbClr val="000000"/>
                   </a:solidFill>
@@ -5456,7 +5456,7 @@
             </a:ln>
             <a:extLst>
               <a:ext uri="{91240B29-F687-4f45-9708-019B960494DF}">
-                <a14:hiddenLine xmlns:a14="http://schemas.microsoft.com/office/drawing/2010/main" xmlns="" w="9525">
+                <a14:hiddenLine xmlns="" xmlns:a14="http://schemas.microsoft.com/office/drawing/2010/main" w="9525">
                   <a:solidFill>
                     <a:srgbClr val="000000"/>
                   </a:solidFill>
@@ -5521,7 +5521,7 @@
             </a:ln>
             <a:extLst>
               <a:ext uri="{91240B29-F687-4f45-9708-019B960494DF}">
-                <a14:hiddenLine xmlns:a14="http://schemas.microsoft.com/office/drawing/2010/main" xmlns="" w="9525">
+                <a14:hiddenLine xmlns="" xmlns:a14="http://schemas.microsoft.com/office/drawing/2010/main" w="9525">
                   <a:solidFill>
                     <a:srgbClr val="000000"/>
                   </a:solidFill>
@@ -5611,7 +5611,7 @@
             </a:ln>
             <a:extLst>
               <a:ext uri="{91240B29-F687-4f45-9708-019B960494DF}">
-                <a14:hiddenLine xmlns:a14="http://schemas.microsoft.com/office/drawing/2010/main" xmlns="" w="9525">
+                <a14:hiddenLine xmlns="" xmlns:a14="http://schemas.microsoft.com/office/drawing/2010/main" w="9525">
                   <a:solidFill>
                     <a:srgbClr val="000000"/>
                   </a:solidFill>
@@ -5673,7 +5673,7 @@
             </a:ln>
             <a:extLst>
               <a:ext uri="{91240B29-F687-4f45-9708-019B960494DF}">
-                <a14:hiddenLine xmlns:a14="http://schemas.microsoft.com/office/drawing/2010/main" xmlns="" w="9525">
+                <a14:hiddenLine xmlns="" xmlns:a14="http://schemas.microsoft.com/office/drawing/2010/main" w="9525">
                   <a:solidFill>
                     <a:srgbClr val="000000"/>
                   </a:solidFill>
@@ -5763,7 +5763,7 @@
             </a:ln>
             <a:extLst>
               <a:ext uri="{91240B29-F687-4f45-9708-019B960494DF}">
-                <a14:hiddenLine xmlns:a14="http://schemas.microsoft.com/office/drawing/2010/main" xmlns="" w="9525">
+                <a14:hiddenLine xmlns="" xmlns:a14="http://schemas.microsoft.com/office/drawing/2010/main" w="9525">
                   <a:solidFill>
                     <a:srgbClr val="000000"/>
                   </a:solidFill>
@@ -5853,7 +5853,7 @@
             </a:ln>
             <a:extLst>
               <a:ext uri="{91240B29-F687-4f45-9708-019B960494DF}">
-                <a14:hiddenLine xmlns:a14="http://schemas.microsoft.com/office/drawing/2010/main" xmlns="" w="9525">
+                <a14:hiddenLine xmlns="" xmlns:a14="http://schemas.microsoft.com/office/drawing/2010/main" w="9525">
                   <a:solidFill>
                     <a:srgbClr val="000000"/>
                   </a:solidFill>
@@ -5918,7 +5918,7 @@
             </a:ln>
             <a:extLst>
               <a:ext uri="{91240B29-F687-4f45-9708-019B960494DF}">
-                <a14:hiddenLine xmlns:a14="http://schemas.microsoft.com/office/drawing/2010/main" xmlns="" w="9525">
+                <a14:hiddenLine xmlns="" xmlns:a14="http://schemas.microsoft.com/office/drawing/2010/main" w="9525">
                   <a:solidFill>
                     <a:srgbClr val="000000"/>
                   </a:solidFill>
@@ -5980,7 +5980,7 @@
             </a:ln>
             <a:extLst>
               <a:ext uri="{91240B29-F687-4f45-9708-019B960494DF}">
-                <a14:hiddenLine xmlns:a14="http://schemas.microsoft.com/office/drawing/2010/main" xmlns="" w="9525">
+                <a14:hiddenLine xmlns="" xmlns:a14="http://schemas.microsoft.com/office/drawing/2010/main" w="9525">
                   <a:solidFill>
                     <a:srgbClr val="000000"/>
                   </a:solidFill>
@@ -6070,7 +6070,7 @@
             </a:ln>
             <a:extLst>
               <a:ext uri="{91240B29-F687-4f45-9708-019B960494DF}">
-                <a14:hiddenLine xmlns:a14="http://schemas.microsoft.com/office/drawing/2010/main" xmlns="" w="9525">
+                <a14:hiddenLine xmlns="" xmlns:a14="http://schemas.microsoft.com/office/drawing/2010/main" w="9525">
                   <a:solidFill>
                     <a:srgbClr val="000000"/>
                   </a:solidFill>
@@ -6160,7 +6160,7 @@
             </a:ln>
             <a:extLst>
               <a:ext uri="{91240B29-F687-4f45-9708-019B960494DF}">
-                <a14:hiddenLine xmlns:a14="http://schemas.microsoft.com/office/drawing/2010/main" xmlns="" w="9525">
+                <a14:hiddenLine xmlns="" xmlns:a14="http://schemas.microsoft.com/office/drawing/2010/main" w="9525">
                   <a:solidFill>
                     <a:srgbClr val="000000"/>
                   </a:solidFill>
@@ -6222,7 +6222,7 @@
             </a:ln>
             <a:extLst>
               <a:ext uri="{91240B29-F687-4f45-9708-019B960494DF}">
-                <a14:hiddenLine xmlns:a14="http://schemas.microsoft.com/office/drawing/2010/main" xmlns="" w="9525">
+                <a14:hiddenLine xmlns="" xmlns:a14="http://schemas.microsoft.com/office/drawing/2010/main" w="9525">
                   <a:solidFill>
                     <a:srgbClr val="000000"/>
                   </a:solidFill>
@@ -6342,7 +6342,7 @@
             </a:ln>
             <a:extLst>
               <a:ext uri="{91240B29-F687-4f45-9708-019B960494DF}">
-                <a14:hiddenLine xmlns:a14="http://schemas.microsoft.com/office/drawing/2010/main" xmlns="" w="9525">
+                <a14:hiddenLine xmlns="" xmlns:a14="http://schemas.microsoft.com/office/drawing/2010/main" w="9525">
                   <a:solidFill>
                     <a:srgbClr val="000000"/>
                   </a:solidFill>
@@ -6410,7 +6410,7 @@
             </a:ln>
             <a:extLst>
               <a:ext uri="{91240B29-F687-4f45-9708-019B960494DF}">
-                <a14:hiddenLine xmlns:a14="http://schemas.microsoft.com/office/drawing/2010/main" xmlns="" w="9525">
+                <a14:hiddenLine xmlns="" xmlns:a14="http://schemas.microsoft.com/office/drawing/2010/main" w="9525">
                   <a:solidFill>
                     <a:srgbClr val="000000"/>
                   </a:solidFill>
@@ -6500,7 +6500,7 @@
             </a:ln>
             <a:extLst>
               <a:ext uri="{91240B29-F687-4f45-9708-019B960494DF}">
-                <a14:hiddenLine xmlns:a14="http://schemas.microsoft.com/office/drawing/2010/main" xmlns="" w="9525">
+                <a14:hiddenLine xmlns="" xmlns:a14="http://schemas.microsoft.com/office/drawing/2010/main" w="9525">
                   <a:solidFill>
                     <a:srgbClr val="000000"/>
                   </a:solidFill>
@@ -6640,7 +6640,7 @@
           <a:p>
             <a:fld id="{48A87A34-81AB-432B-8DAE-1953F412C126}" type="datetimeFigureOut">
               <a:rPr lang="en-US" dirty="0"/>
-              <a:t>6/22/2026</a:t>
+              <a:t>9/8/2026</a:t>
             </a:fld>
             <a:endParaRPr lang="en-US" dirty="0"/>
           </a:p>
@@ -6908,7 +6908,7 @@
           <a:p>
             <a:fld id="{48A87A34-81AB-432B-8DAE-1953F412C126}" type="datetimeFigureOut">
               <a:rPr lang="en-US" dirty="0"/>
-              <a:t>6/22/2026</a:t>
+              <a:t>9/8/2026</a:t>
             </a:fld>
             <a:endParaRPr lang="en-US" dirty="0"/>
           </a:p>
@@ -7105,7 +7105,7 @@
           <a:p>
             <a:fld id="{48A87A34-81AB-432B-8DAE-1953F412C126}" type="datetimeFigureOut">
               <a:rPr lang="en-US" dirty="0"/>
-              <a:t>6/22/2026</a:t>
+              <a:t>9/8/2026</a:t>
             </a:fld>
             <a:endParaRPr lang="en-US" dirty="0"/>
           </a:p>
@@ -7369,7 +7369,7 @@
           <a:p>
             <a:fld id="{48A87A34-81AB-432B-8DAE-1953F412C126}" type="datetimeFigureOut">
               <a:rPr lang="en-US" dirty="0"/>
-              <a:t>6/22/2026</a:t>
+              <a:t>9/8/2026</a:t>
             </a:fld>
             <a:endParaRPr lang="en-US" dirty="0"/>
           </a:p>
@@ -7804,7 +7804,7 @@
           <a:p>
             <a:fld id="{48A87A34-81AB-432B-8DAE-1953F412C126}" type="datetimeFigureOut">
               <a:rPr lang="en-US" dirty="0"/>
-              <a:t>6/22/2026</a:t>
+              <a:t>9/8/2026</a:t>
             </a:fld>
             <a:endParaRPr lang="en-US" dirty="0"/>
           </a:p>
@@ -8351,7 +8351,7 @@
           <a:p>
             <a:fld id="{48A87A34-81AB-432B-8DAE-1953F412C126}" type="datetimeFigureOut">
               <a:rPr lang="en-US" dirty="0"/>
-              <a:t>6/22/2026</a:t>
+              <a:t>9/8/2026</a:t>
             </a:fld>
             <a:endParaRPr lang="en-US" dirty="0"/>
           </a:p>
@@ -9072,7 +9072,7 @@
           <a:p>
             <a:fld id="{48A87A34-81AB-432B-8DAE-1953F412C126}" type="datetimeFigureOut">
               <a:rPr lang="en-US" dirty="0"/>
-              <a:t>6/22/2026</a:t>
+              <a:t>9/8/2026</a:t>
             </a:fld>
             <a:endParaRPr lang="en-US" dirty="0"/>
           </a:p>
@@ -9243,7 +9243,7 @@
           <a:p>
             <a:fld id="{48A87A34-81AB-432B-8DAE-1953F412C126}" type="datetimeFigureOut">
               <a:rPr lang="en-US" dirty="0"/>
-              <a:t>6/22/2026</a:t>
+              <a:t>9/8/2026</a:t>
             </a:fld>
             <a:endParaRPr lang="en-US" dirty="0"/>
           </a:p>
@@ -9424,7 +9424,7 @@
           <a:p>
             <a:fld id="{48A87A34-81AB-432B-8DAE-1953F412C126}" type="datetimeFigureOut">
               <a:rPr lang="en-US" dirty="0"/>
-              <a:t>6/22/2026</a:t>
+              <a:t>9/8/2026</a:t>
             </a:fld>
             <a:endParaRPr lang="en-US" dirty="0"/>
           </a:p>
@@ -9630,7 +9630,7 @@
           <a:p>
             <a:fld id="{48A87A34-81AB-432B-8DAE-1953F412C126}" type="datetimeFigureOut">
               <a:rPr lang="en-US" dirty="0"/>
-              <a:t>6/22/2026</a:t>
+              <a:t>9/8/2026</a:t>
             </a:fld>
             <a:endParaRPr lang="en-US" dirty="0"/>
           </a:p>
@@ -9881,7 +9881,7 @@
           <a:p>
             <a:fld id="{48A87A34-81AB-432B-8DAE-1953F412C126}" type="datetimeFigureOut">
               <a:rPr lang="en-US" dirty="0"/>
-              <a:t>6/22/2026</a:t>
+              <a:t>9/8/2026</a:t>
             </a:fld>
             <a:endParaRPr lang="en-US" dirty="0"/>
           </a:p>
@@ -10114,7 +10114,7 @@
           <a:p>
             <a:fld id="{48A87A34-81AB-432B-8DAE-1953F412C126}" type="datetimeFigureOut">
               <a:rPr lang="en-US" dirty="0"/>
-              <a:t>6/22/2026</a:t>
+              <a:t>9/8/2026</a:t>
             </a:fld>
             <a:endParaRPr lang="en-US" dirty="0"/>
           </a:p>
@@ -10496,7 +10496,7 @@
           <a:p>
             <a:fld id="{48A87A34-81AB-432B-8DAE-1953F412C126}" type="datetimeFigureOut">
               <a:rPr lang="en-US" dirty="0"/>
-              <a:t>6/22/2026</a:t>
+              <a:t>9/8/2026</a:t>
             </a:fld>
             <a:endParaRPr lang="en-US" dirty="0"/>
           </a:p>
@@ -10615,7 +10615,7 @@
           <a:p>
             <a:fld id="{48A87A34-81AB-432B-8DAE-1953F412C126}" type="datetimeFigureOut">
               <a:rPr lang="en-US" dirty="0"/>
-              <a:t>6/22/2026</a:t>
+              <a:t>9/8/2026</a:t>
             </a:fld>
             <a:endParaRPr lang="en-US" dirty="0"/>
           </a:p>
@@ -10711,7 +10711,7 @@
           <a:p>
             <a:fld id="{48A87A34-81AB-432B-8DAE-1953F412C126}" type="datetimeFigureOut">
               <a:rPr lang="en-US" dirty="0"/>
-              <a:t>6/22/2026</a:t>
+              <a:t>9/8/2026</a:t>
             </a:fld>
             <a:endParaRPr lang="en-US" dirty="0"/>
           </a:p>
@@ -10961,7 +10961,7 @@
           <a:p>
             <a:fld id="{48A87A34-81AB-432B-8DAE-1953F412C126}" type="datetimeFigureOut">
               <a:rPr lang="en-US" dirty="0"/>
-              <a:t>6/22/2026</a:t>
+              <a:t>9/8/2026</a:t>
             </a:fld>
             <a:endParaRPr lang="en-US" dirty="0"/>
           </a:p>
@@ -11242,7 +11242,7 @@
           <a:p>
             <a:fld id="{48A87A34-81AB-432B-8DAE-1953F412C126}" type="datetimeFigureOut">
               <a:rPr lang="en-US" dirty="0"/>
-              <a:t>6/22/2026</a:t>
+              <a:t>9/8/2026</a:t>
             </a:fld>
             <a:endParaRPr lang="en-US" dirty="0"/>
           </a:p>
@@ -11359,7 +11359,7 @@
           <a:noFill/>
           <a:extLst>
             <a:ext uri="{909E8E84-426E-40dd-AFC4-6F175D3DCCD1}">
-              <a14:hiddenFill xmlns:a14="http://schemas.microsoft.com/office/drawing/2010/main" xmlns="">
+              <a14:hiddenFill xmlns="" xmlns:a14="http://schemas.microsoft.com/office/drawing/2010/main">
                 <a:solidFill>
                   <a:srgbClr val="FFFFFF"/>
                 </a:solidFill>
@@ -11433,7 +11433,7 @@
               </a:ln>
               <a:extLst>
                 <a:ext uri="{91240B29-F687-4f45-9708-019B960494DF}">
-                  <a14:hiddenLine xmlns:a14="http://schemas.microsoft.com/office/drawing/2010/main" xmlns="" w="9525">
+                  <a14:hiddenLine xmlns="" xmlns:a14="http://schemas.microsoft.com/office/drawing/2010/main" w="9525">
                     <a:solidFill>
                       <a:srgbClr val="000000"/>
                     </a:solidFill>
@@ -11523,7 +11523,7 @@
               </a:ln>
               <a:extLst>
                 <a:ext uri="{91240B29-F687-4f45-9708-019B960494DF}">
-                  <a14:hiddenLine xmlns:a14="http://schemas.microsoft.com/office/drawing/2010/main" xmlns="" w="9525">
+                  <a14:hiddenLine xmlns="" xmlns:a14="http://schemas.microsoft.com/office/drawing/2010/main" w="9525">
                     <a:solidFill>
                       <a:srgbClr val="000000"/>
                     </a:solidFill>
@@ -11613,7 +11613,7 @@
               </a:ln>
               <a:extLst>
                 <a:ext uri="{91240B29-F687-4f45-9708-019B960494DF}">
-                  <a14:hiddenLine xmlns:a14="http://schemas.microsoft.com/office/drawing/2010/main" xmlns="" w="9525">
+                  <a14:hiddenLine xmlns="" xmlns:a14="http://schemas.microsoft.com/office/drawing/2010/main" w="9525">
                     <a:solidFill>
                       <a:srgbClr val="000000"/>
                     </a:solidFill>
@@ -11675,7 +11675,7 @@
               </a:ln>
               <a:extLst>
                 <a:ext uri="{91240B29-F687-4f45-9708-019B960494DF}">
-                  <a14:hiddenLine xmlns:a14="http://schemas.microsoft.com/office/drawing/2010/main" xmlns="" w="9525">
+                  <a14:hiddenLine xmlns="" xmlns:a14="http://schemas.microsoft.com/office/drawing/2010/main" w="9525">
                     <a:solidFill>
                       <a:srgbClr val="000000"/>
                     </a:solidFill>
@@ -11765,7 +11765,7 @@
               </a:ln>
               <a:extLst>
                 <a:ext uri="{91240B29-F687-4f45-9708-019B960494DF}">
-                  <a14:hiddenLine xmlns:a14="http://schemas.microsoft.com/office/drawing/2010/main" xmlns="" w="9525">
+                  <a14:hiddenLine xmlns="" xmlns:a14="http://schemas.microsoft.com/office/drawing/2010/main" w="9525">
                     <a:solidFill>
                       <a:srgbClr val="000000"/>
                     </a:solidFill>
@@ -11827,7 +11827,7 @@
               </a:ln>
               <a:extLst>
                 <a:ext uri="{91240B29-F687-4f45-9708-019B960494DF}">
-                  <a14:hiddenLine xmlns:a14="http://schemas.microsoft.com/office/drawing/2010/main" xmlns="" w="9525">
+                  <a14:hiddenLine xmlns="" xmlns:a14="http://schemas.microsoft.com/office/drawing/2010/main" w="9525">
                     <a:solidFill>
                       <a:srgbClr val="000000"/>
                     </a:solidFill>
@@ -11889,7 +11889,7 @@
               </a:ln>
               <a:extLst>
                 <a:ext uri="{91240B29-F687-4f45-9708-019B960494DF}">
-                  <a14:hiddenLine xmlns:a14="http://schemas.microsoft.com/office/drawing/2010/main" xmlns="" w="9525">
+                  <a14:hiddenLine xmlns="" xmlns:a14="http://schemas.microsoft.com/office/drawing/2010/main" w="9525">
                     <a:solidFill>
                       <a:srgbClr val="000000"/>
                     </a:solidFill>
@@ -11979,7 +11979,7 @@
               </a:ln>
               <a:extLst>
                 <a:ext uri="{91240B29-F687-4f45-9708-019B960494DF}">
-                  <a14:hiddenLine xmlns:a14="http://schemas.microsoft.com/office/drawing/2010/main" xmlns="" w="9525">
+                  <a14:hiddenLine xmlns="" xmlns:a14="http://schemas.microsoft.com/office/drawing/2010/main" w="9525">
                     <a:solidFill>
                       <a:srgbClr val="000000"/>
                     </a:solidFill>
@@ -12069,7 +12069,7 @@
               </a:ln>
               <a:extLst>
                 <a:ext uri="{91240B29-F687-4f45-9708-019B960494DF}">
-                  <a14:hiddenLine xmlns:a14="http://schemas.microsoft.com/office/drawing/2010/main" xmlns="" w="9525">
+                  <a14:hiddenLine xmlns="" xmlns:a14="http://schemas.microsoft.com/office/drawing/2010/main" w="9525">
                     <a:solidFill>
                       <a:srgbClr val="000000"/>
                     </a:solidFill>
@@ -12131,7 +12131,7 @@
               </a:ln>
               <a:extLst>
                 <a:ext uri="{91240B29-F687-4f45-9708-019B960494DF}">
-                  <a14:hiddenLine xmlns:a14="http://schemas.microsoft.com/office/drawing/2010/main" xmlns="" w="9525">
+                  <a14:hiddenLine xmlns="" xmlns:a14="http://schemas.microsoft.com/office/drawing/2010/main" w="9525">
                     <a:solidFill>
                       <a:srgbClr val="000000"/>
                     </a:solidFill>
@@ -12241,7 +12241,7 @@
               </a:ln>
               <a:extLst>
                 <a:ext uri="{91240B29-F687-4f45-9708-019B960494DF}">
-                  <a14:hiddenLine xmlns:a14="http://schemas.microsoft.com/office/drawing/2010/main" xmlns="" w="9525">
+                  <a14:hiddenLine xmlns="" xmlns:a14="http://schemas.microsoft.com/office/drawing/2010/main" w="9525">
                     <a:solidFill>
                       <a:srgbClr val="000000"/>
                     </a:solidFill>
@@ -12325,7 +12325,7 @@
               </a:ln>
               <a:extLst>
                 <a:ext uri="{91240B29-F687-4f45-9708-019B960494DF}">
-                  <a14:hiddenLine xmlns:a14="http://schemas.microsoft.com/office/drawing/2010/main" xmlns="" w="9525">
+                  <a14:hiddenLine xmlns="" xmlns:a14="http://schemas.microsoft.com/office/drawing/2010/main" w="9525">
                     <a:solidFill>
                       <a:srgbClr val="000000"/>
                     </a:solidFill>
@@ -12387,7 +12387,7 @@
               </a:ln>
               <a:extLst>
                 <a:ext uri="{91240B29-F687-4f45-9708-019B960494DF}">
-                  <a14:hiddenLine xmlns:a14="http://schemas.microsoft.com/office/drawing/2010/main" xmlns="" w="9525">
+                  <a14:hiddenLine xmlns="" xmlns:a14="http://schemas.microsoft.com/office/drawing/2010/main" w="9525">
                     <a:solidFill>
                       <a:srgbClr val="000000"/>
                     </a:solidFill>
@@ -12449,7 +12449,7 @@
               </a:ln>
               <a:extLst>
                 <a:ext uri="{91240B29-F687-4f45-9708-019B960494DF}">
-                  <a14:hiddenLine xmlns:a14="http://schemas.microsoft.com/office/drawing/2010/main" xmlns="" w="9525">
+                  <a14:hiddenLine xmlns="" xmlns:a14="http://schemas.microsoft.com/office/drawing/2010/main" w="9525">
                     <a:solidFill>
                       <a:srgbClr val="000000"/>
                     </a:solidFill>
@@ -12539,7 +12539,7 @@
               </a:ln>
               <a:extLst>
                 <a:ext uri="{91240B29-F687-4f45-9708-019B960494DF}">
-                  <a14:hiddenLine xmlns:a14="http://schemas.microsoft.com/office/drawing/2010/main" xmlns="" w="9525">
+                  <a14:hiddenLine xmlns="" xmlns:a14="http://schemas.microsoft.com/office/drawing/2010/main" w="9525">
                     <a:solidFill>
                       <a:srgbClr val="000000"/>
                     </a:solidFill>
@@ -12573,7 +12573,7 @@
               </a:ln>
               <a:extLst>
                 <a:ext uri="{91240B29-F687-4f45-9708-019B960494DF}">
-                  <a14:hiddenLine xmlns:a14="http://schemas.microsoft.com/office/drawing/2010/main" xmlns="" w="9525">
+                  <a14:hiddenLine xmlns="" xmlns:a14="http://schemas.microsoft.com/office/drawing/2010/main" w="9525">
                     <a:solidFill>
                       <a:srgbClr val="000000"/>
                     </a:solidFill>
@@ -12638,7 +12638,7 @@
               </a:ln>
               <a:extLst>
                 <a:ext uri="{91240B29-F687-4f45-9708-019B960494DF}">
-                  <a14:hiddenLine xmlns:a14="http://schemas.microsoft.com/office/drawing/2010/main" xmlns="" w="9525">
+                  <a14:hiddenLine xmlns="" xmlns:a14="http://schemas.microsoft.com/office/drawing/2010/main" w="9525">
                     <a:solidFill>
                       <a:srgbClr val="000000"/>
                     </a:solidFill>
@@ -12728,7 +12728,7 @@
               </a:ln>
               <a:extLst>
                 <a:ext uri="{91240B29-F687-4f45-9708-019B960494DF}">
-                  <a14:hiddenLine xmlns:a14="http://schemas.microsoft.com/office/drawing/2010/main" xmlns="" w="9525">
+                  <a14:hiddenLine xmlns="" xmlns:a14="http://schemas.microsoft.com/office/drawing/2010/main" w="9525">
                     <a:solidFill>
                       <a:srgbClr val="000000"/>
                     </a:solidFill>
@@ -12790,7 +12790,7 @@
               </a:ln>
               <a:extLst>
                 <a:ext uri="{91240B29-F687-4f45-9708-019B960494DF}">
-                  <a14:hiddenLine xmlns:a14="http://schemas.microsoft.com/office/drawing/2010/main" xmlns="" w="9525">
+                  <a14:hiddenLine xmlns="" xmlns:a14="http://schemas.microsoft.com/office/drawing/2010/main" w="9525">
                     <a:solidFill>
                       <a:srgbClr val="000000"/>
                     </a:solidFill>
@@ -12880,7 +12880,7 @@
               </a:ln>
               <a:extLst>
                 <a:ext uri="{91240B29-F687-4f45-9708-019B960494DF}">
-                  <a14:hiddenLine xmlns:a14="http://schemas.microsoft.com/office/drawing/2010/main" xmlns="" w="9525">
+                  <a14:hiddenLine xmlns="" xmlns:a14="http://schemas.microsoft.com/office/drawing/2010/main" w="9525">
                     <a:solidFill>
                       <a:srgbClr val="000000"/>
                     </a:solidFill>
@@ -12945,7 +12945,7 @@
               </a:ln>
               <a:extLst>
                 <a:ext uri="{91240B29-F687-4f45-9708-019B960494DF}">
-                  <a14:hiddenLine xmlns:a14="http://schemas.microsoft.com/office/drawing/2010/main" xmlns="" w="9525">
+                  <a14:hiddenLine xmlns="" xmlns:a14="http://schemas.microsoft.com/office/drawing/2010/main" w="9525">
                     <a:solidFill>
                       <a:srgbClr val="000000"/>
                     </a:solidFill>
@@ -13007,7 +13007,7 @@
               </a:ln>
               <a:extLst>
                 <a:ext uri="{91240B29-F687-4f45-9708-019B960494DF}">
-                  <a14:hiddenLine xmlns:a14="http://schemas.microsoft.com/office/drawing/2010/main" xmlns="" w="9525">
+                  <a14:hiddenLine xmlns="" xmlns:a14="http://schemas.microsoft.com/office/drawing/2010/main" w="9525">
                     <a:solidFill>
                       <a:srgbClr val="000000"/>
                     </a:solidFill>
@@ -13097,7 +13097,7 @@
               </a:ln>
               <a:extLst>
                 <a:ext uri="{91240B29-F687-4f45-9708-019B960494DF}">
-                  <a14:hiddenLine xmlns:a14="http://schemas.microsoft.com/office/drawing/2010/main" xmlns="" w="9525">
+                  <a14:hiddenLine xmlns="" xmlns:a14="http://schemas.microsoft.com/office/drawing/2010/main" w="9525">
                     <a:solidFill>
                       <a:srgbClr val="000000"/>
                     </a:solidFill>
@@ -13187,7 +13187,7 @@
               </a:ln>
               <a:extLst>
                 <a:ext uri="{91240B29-F687-4f45-9708-019B960494DF}">
-                  <a14:hiddenLine xmlns:a14="http://schemas.microsoft.com/office/drawing/2010/main" xmlns="" w="9525">
+                  <a14:hiddenLine xmlns="" xmlns:a14="http://schemas.microsoft.com/office/drawing/2010/main" w="9525">
                     <a:solidFill>
                       <a:srgbClr val="000000"/>
                     </a:solidFill>
@@ -13252,7 +13252,7 @@
               </a:ln>
               <a:extLst>
                 <a:ext uri="{91240B29-F687-4f45-9708-019B960494DF}">
-                  <a14:hiddenLine xmlns:a14="http://schemas.microsoft.com/office/drawing/2010/main" xmlns="" w="9525">
+                  <a14:hiddenLine xmlns="" xmlns:a14="http://schemas.microsoft.com/office/drawing/2010/main" w="9525">
                     <a:solidFill>
                       <a:srgbClr val="000000"/>
                     </a:solidFill>
@@ -13372,7 +13372,7 @@
               </a:ln>
               <a:extLst>
                 <a:ext uri="{91240B29-F687-4f45-9708-019B960494DF}">
-                  <a14:hiddenLine xmlns:a14="http://schemas.microsoft.com/office/drawing/2010/main" xmlns="" w="9525">
+                  <a14:hiddenLine xmlns="" xmlns:a14="http://schemas.microsoft.com/office/drawing/2010/main" w="9525">
                     <a:solidFill>
                       <a:srgbClr val="000000"/>
                     </a:solidFill>
@@ -13470,7 +13470,7 @@
               </a:ln>
               <a:extLst>
                 <a:ext uri="{91240B29-F687-4f45-9708-019B960494DF}">
-                  <a14:hiddenLine xmlns:a14="http://schemas.microsoft.com/office/drawing/2010/main" xmlns="" w="9525">
+                  <a14:hiddenLine xmlns="" xmlns:a14="http://schemas.microsoft.com/office/drawing/2010/main" w="9525">
                     <a:solidFill>
                       <a:srgbClr val="000000"/>
                     </a:solidFill>
@@ -13585,7 +13585,7 @@
               </a:ln>
               <a:extLst>
                 <a:ext uri="{91240B29-F687-4f45-9708-019B960494DF}">
-                  <a14:hiddenLine xmlns:a14="http://schemas.microsoft.com/office/drawing/2010/main" xmlns="" w="9525">
+                  <a14:hiddenLine xmlns="" xmlns:a14="http://schemas.microsoft.com/office/drawing/2010/main" w="9525">
                     <a:solidFill>
                       <a:srgbClr val="000000"/>
                     </a:solidFill>
@@ -13675,7 +13675,7 @@
               </a:ln>
               <a:extLst>
                 <a:ext uri="{91240B29-F687-4f45-9708-019B960494DF}">
-                  <a14:hiddenLine xmlns:a14="http://schemas.microsoft.com/office/drawing/2010/main" xmlns="" w="9525">
+                  <a14:hiddenLine xmlns="" xmlns:a14="http://schemas.microsoft.com/office/drawing/2010/main" w="9525">
                     <a:solidFill>
                       <a:srgbClr val="000000"/>
                     </a:solidFill>
@@ -13740,7 +13740,7 @@
               </a:ln>
               <a:extLst>
                 <a:ext uri="{91240B29-F687-4f45-9708-019B960494DF}">
-                  <a14:hiddenLine xmlns:a14="http://schemas.microsoft.com/office/drawing/2010/main" xmlns="" w="9525">
+                  <a14:hiddenLine xmlns="" xmlns:a14="http://schemas.microsoft.com/office/drawing/2010/main" w="9525">
                     <a:solidFill>
                       <a:srgbClr val="000000"/>
                     </a:solidFill>
@@ -13830,7 +13830,7 @@
               </a:ln>
               <a:extLst>
                 <a:ext uri="{91240B29-F687-4f45-9708-019B960494DF}">
-                  <a14:hiddenLine xmlns:a14="http://schemas.microsoft.com/office/drawing/2010/main" xmlns="" w="9525">
+                  <a14:hiddenLine xmlns="" xmlns:a14="http://schemas.microsoft.com/office/drawing/2010/main" w="9525">
                     <a:solidFill>
                       <a:srgbClr val="000000"/>
                     </a:solidFill>
@@ -13898,7 +13898,7 @@
               </a:ln>
               <a:extLst>
                 <a:ext uri="{91240B29-F687-4f45-9708-019B960494DF}">
-                  <a14:hiddenLine xmlns:a14="http://schemas.microsoft.com/office/drawing/2010/main" xmlns="" w="9525">
+                  <a14:hiddenLine xmlns="" xmlns:a14="http://schemas.microsoft.com/office/drawing/2010/main" w="9525">
                     <a:solidFill>
                       <a:srgbClr val="000000"/>
                     </a:solidFill>
@@ -13988,7 +13988,7 @@
               </a:ln>
               <a:extLst>
                 <a:ext uri="{91240B29-F687-4f45-9708-019B960494DF}">
-                  <a14:hiddenLine xmlns:a14="http://schemas.microsoft.com/office/drawing/2010/main" xmlns="" w="9525">
+                  <a14:hiddenLine xmlns="" xmlns:a14="http://schemas.microsoft.com/office/drawing/2010/main" w="9525">
                     <a:solidFill>
                       <a:srgbClr val="000000"/>
                     </a:solidFill>
@@ -14056,7 +14056,7 @@
               </a:ln>
               <a:extLst>
                 <a:ext uri="{91240B29-F687-4f45-9708-019B960494DF}">
-                  <a14:hiddenLine xmlns:a14="http://schemas.microsoft.com/office/drawing/2010/main" xmlns="" w="9525">
+                  <a14:hiddenLine xmlns="" xmlns:a14="http://schemas.microsoft.com/office/drawing/2010/main" w="9525">
                     <a:solidFill>
                       <a:srgbClr val="000000"/>
                     </a:solidFill>
@@ -14146,7 +14146,7 @@
               </a:ln>
               <a:extLst>
                 <a:ext uri="{91240B29-F687-4f45-9708-019B960494DF}">
-                  <a14:hiddenLine xmlns:a14="http://schemas.microsoft.com/office/drawing/2010/main" xmlns="" w="9525">
+                  <a14:hiddenLine xmlns="" xmlns:a14="http://schemas.microsoft.com/office/drawing/2010/main" w="9525">
                     <a:solidFill>
                       <a:srgbClr val="000000"/>
                     </a:solidFill>
@@ -14180,7 +14180,7 @@
               </a:ln>
               <a:extLst>
                 <a:ext uri="{91240B29-F687-4f45-9708-019B960494DF}">
-                  <a14:hiddenLine xmlns:a14="http://schemas.microsoft.com/office/drawing/2010/main" xmlns="" w="9525">
+                  <a14:hiddenLine xmlns="" xmlns:a14="http://schemas.microsoft.com/office/drawing/2010/main" w="9525">
                     <a:solidFill>
                       <a:srgbClr val="000000"/>
                     </a:solidFill>
@@ -14321,7 +14321,7 @@
             <a:fld id="{48A87A34-81AB-432B-8DAE-1953F412C126}" type="datetimeFigureOut">
               <a:rPr lang="en-US" dirty="0"/>
               <a:pPr/>
-              <a:t>6/22/2026</a:t>
+              <a:t>9/8/2026</a:t>
             </a:fld>
             <a:endParaRPr lang="en-US" dirty="0"/>
           </a:p>
@@ -15106,6 +15106,46 @@
           </a:p>
         </p:txBody>
       </p:sp>
+      <p:sp>
+        <p:nvSpPr>
+          <p:cNvPr id="13" name="ZoneTexte 12">
+            <a:extLst>
+              <a:ext uri="{FF2B5EF4-FFF2-40B4-BE49-F238E27FC236}">
+                <a16:creationId xmlns:a16="http://schemas.microsoft.com/office/drawing/2014/main" id="{529BDB0C-9B27-306D-B006-7A72A279BD48}"/>
+              </a:ext>
+            </a:extLst>
+          </p:cNvPr>
+          <p:cNvSpPr txBox="1"/>
+          <p:nvPr/>
+        </p:nvSpPr>
+        <p:spPr>
+          <a:xfrm>
+            <a:off x="0" y="6578600"/>
+            <a:ext cx="12192000" cy="230832"/>
+          </a:xfrm>
+          <a:prstGeom prst="rect">
+            <a:avLst/>
+          </a:prstGeom>
+          <a:noFill/>
+        </p:spPr>
+        <p:txBody>
+          <a:bodyPr vert="horz" rtlCol="0">
+            <a:spAutoFit/>
+          </a:bodyPr>
+          <a:lstStyle/>
+          <a:p>
+            <a:pPr algn="ctr"/>
+            <a:r>
+              <a:rPr lang="fr-FR" sz="900">
+                <a:solidFill>
+                  <a:srgbClr val="B4B4B4"/>
+                </a:solidFill>
+              </a:rPr>
+              <a:t>(c) titi_23 - mediateur-numerique.github.io - Reproduction interdite sans autorisation</a:t>
+            </a:r>
+          </a:p>
+        </p:txBody>
+      </p:sp>
     </p:spTree>
   </p:cSld>
   <p:clrMapOvr>
@@ -16039,6 +16079,46 @@
           </a:p>
         </p:txBody>
       </p:sp>
+      <p:sp>
+        <p:nvSpPr>
+          <p:cNvPr id="24" name="ZoneTexte 23">
+            <a:extLst>
+              <a:ext uri="{FF2B5EF4-FFF2-40B4-BE49-F238E27FC236}">
+                <a16:creationId xmlns:a16="http://schemas.microsoft.com/office/drawing/2014/main" id="{0C22AC8C-6527-A161-4430-8EA8FA2A33A9}"/>
+              </a:ext>
+            </a:extLst>
+          </p:cNvPr>
+          <p:cNvSpPr txBox="1"/>
+          <p:nvPr/>
+        </p:nvSpPr>
+        <p:spPr>
+          <a:xfrm>
+            <a:off x="0" y="6578600"/>
+            <a:ext cx="12192000" cy="230832"/>
+          </a:xfrm>
+          <a:prstGeom prst="rect">
+            <a:avLst/>
+          </a:prstGeom>
+          <a:noFill/>
+        </p:spPr>
+        <p:txBody>
+          <a:bodyPr vert="horz" rtlCol="0">
+            <a:spAutoFit/>
+          </a:bodyPr>
+          <a:lstStyle/>
+          <a:p>
+            <a:pPr algn="ctr"/>
+            <a:r>
+              <a:rPr lang="fr-FR" sz="900">
+                <a:solidFill>
+                  <a:srgbClr val="B4B4B4"/>
+                </a:solidFill>
+              </a:rPr>
+              <a:t>(c) titi_23 - mediateur-numerique.github.io - Reproduction interdite sans autorisation</a:t>
+            </a:r>
+          </a:p>
+        </p:txBody>
+      </p:sp>
     </p:spTree>
   </p:cSld>
   <p:clrMapOvr>
@@ -16530,6 +16610,46 @@
           </a:p>
         </p:txBody>
       </p:sp>
+      <p:sp>
+        <p:nvSpPr>
+          <p:cNvPr id="14" name="ZoneTexte 13">
+            <a:extLst>
+              <a:ext uri="{FF2B5EF4-FFF2-40B4-BE49-F238E27FC236}">
+                <a16:creationId xmlns:a16="http://schemas.microsoft.com/office/drawing/2014/main" id="{5FED9ACB-35FF-E705-B1D7-750118025D03}"/>
+              </a:ext>
+            </a:extLst>
+          </p:cNvPr>
+          <p:cNvSpPr txBox="1"/>
+          <p:nvPr/>
+        </p:nvSpPr>
+        <p:spPr>
+          <a:xfrm>
+            <a:off x="0" y="6578600"/>
+            <a:ext cx="12192000" cy="230832"/>
+          </a:xfrm>
+          <a:prstGeom prst="rect">
+            <a:avLst/>
+          </a:prstGeom>
+          <a:noFill/>
+        </p:spPr>
+        <p:txBody>
+          <a:bodyPr vert="horz" rtlCol="0">
+            <a:spAutoFit/>
+          </a:bodyPr>
+          <a:lstStyle/>
+          <a:p>
+            <a:pPr algn="ctr"/>
+            <a:r>
+              <a:rPr lang="fr-FR" sz="900">
+                <a:solidFill>
+                  <a:srgbClr val="B4B4B4"/>
+                </a:solidFill>
+              </a:rPr>
+              <a:t>(c) titi_23 - mediateur-numerique.github.io - Reproduction interdite sans autorisation</a:t>
+            </a:r>
+          </a:p>
+        </p:txBody>
+      </p:sp>
     </p:spTree>
   </p:cSld>
   <p:clrMapOvr>
@@ -17382,6 +17502,46 @@
               <a:t>Tout est bon ? Cliquez sur « Suivant » en bas de page pour avancer.</a:t>
             </a:r>
             <a:endParaRPr lang="en-US" sz="1600" dirty="0"/>
+          </a:p>
+        </p:txBody>
+      </p:sp>
+      <p:sp>
+        <p:nvSpPr>
+          <p:cNvPr id="27" name="ZoneTexte 26">
+            <a:extLst>
+              <a:ext uri="{FF2B5EF4-FFF2-40B4-BE49-F238E27FC236}">
+                <a16:creationId xmlns:a16="http://schemas.microsoft.com/office/drawing/2014/main" id="{ACF1C50B-C0ED-F150-765D-95AEB911843F}"/>
+              </a:ext>
+            </a:extLst>
+          </p:cNvPr>
+          <p:cNvSpPr txBox="1"/>
+          <p:nvPr/>
+        </p:nvSpPr>
+        <p:spPr>
+          <a:xfrm>
+            <a:off x="0" y="6578600"/>
+            <a:ext cx="12192000" cy="230832"/>
+          </a:xfrm>
+          <a:prstGeom prst="rect">
+            <a:avLst/>
+          </a:prstGeom>
+          <a:noFill/>
+        </p:spPr>
+        <p:txBody>
+          <a:bodyPr vert="horz" rtlCol="0">
+            <a:spAutoFit/>
+          </a:bodyPr>
+          <a:lstStyle/>
+          <a:p>
+            <a:pPr algn="ctr"/>
+            <a:r>
+              <a:rPr lang="fr-FR" sz="900">
+                <a:solidFill>
+                  <a:srgbClr val="B4B4B4"/>
+                </a:solidFill>
+              </a:rPr>
+              <a:t>(c) titi_23 - mediateur-numerique.github.io - Reproduction interdite sans autorisation</a:t>
+            </a:r>
           </a:p>
         </p:txBody>
       </p:sp>
@@ -18639,6 +18799,46 @@
           </a:p>
         </p:txBody>
       </p:sp>
+      <p:sp>
+        <p:nvSpPr>
+          <p:cNvPr id="10" name="ZoneTexte 9">
+            <a:extLst>
+              <a:ext uri="{FF2B5EF4-FFF2-40B4-BE49-F238E27FC236}">
+                <a16:creationId xmlns:a16="http://schemas.microsoft.com/office/drawing/2014/main" id="{F8BB4DEA-D7E4-EB34-1D50-B92F583DF975}"/>
+              </a:ext>
+            </a:extLst>
+          </p:cNvPr>
+          <p:cNvSpPr txBox="1"/>
+          <p:nvPr/>
+        </p:nvSpPr>
+        <p:spPr>
+          <a:xfrm>
+            <a:off x="0" y="6578600"/>
+            <a:ext cx="12192000" cy="230832"/>
+          </a:xfrm>
+          <a:prstGeom prst="rect">
+            <a:avLst/>
+          </a:prstGeom>
+          <a:noFill/>
+        </p:spPr>
+        <p:txBody>
+          <a:bodyPr vert="horz" rtlCol="0">
+            <a:spAutoFit/>
+          </a:bodyPr>
+          <a:lstStyle/>
+          <a:p>
+            <a:pPr algn="ctr"/>
+            <a:r>
+              <a:rPr lang="fr-FR" sz="900">
+                <a:solidFill>
+                  <a:srgbClr val="B4B4B4"/>
+                </a:solidFill>
+              </a:rPr>
+              <a:t>(c) titi_23 - mediateur-numerique.github.io - Reproduction interdite sans autorisation</a:t>
+            </a:r>
+          </a:p>
+        </p:txBody>
+      </p:sp>
     </p:spTree>
   </p:cSld>
   <p:clrMapOvr>
@@ -19599,6 +19799,46 @@
           </a:p>
         </p:txBody>
       </p:sp>
+      <p:sp>
+        <p:nvSpPr>
+          <p:cNvPr id="30" name="ZoneTexte 29">
+            <a:extLst>
+              <a:ext uri="{FF2B5EF4-FFF2-40B4-BE49-F238E27FC236}">
+                <a16:creationId xmlns:a16="http://schemas.microsoft.com/office/drawing/2014/main" id="{5BCA9A1B-6C07-4952-F712-E9D745A52C54}"/>
+              </a:ext>
+            </a:extLst>
+          </p:cNvPr>
+          <p:cNvSpPr txBox="1"/>
+          <p:nvPr/>
+        </p:nvSpPr>
+        <p:spPr>
+          <a:xfrm>
+            <a:off x="0" y="6578600"/>
+            <a:ext cx="12192000" cy="230832"/>
+          </a:xfrm>
+          <a:prstGeom prst="rect">
+            <a:avLst/>
+          </a:prstGeom>
+          <a:noFill/>
+        </p:spPr>
+        <p:txBody>
+          <a:bodyPr vert="horz" rtlCol="0">
+            <a:spAutoFit/>
+          </a:bodyPr>
+          <a:lstStyle/>
+          <a:p>
+            <a:pPr algn="ctr"/>
+            <a:r>
+              <a:rPr lang="fr-FR" sz="900">
+                <a:solidFill>
+                  <a:srgbClr val="B4B4B4"/>
+                </a:solidFill>
+              </a:rPr>
+              <a:t>(c) titi_23 - mediateur-numerique.github.io - Reproduction interdite sans autorisation</a:t>
+            </a:r>
+          </a:p>
+        </p:txBody>
+      </p:sp>
     </p:spTree>
   </p:cSld>
   <p:clrMapOvr>
@@ -20410,6 +20650,46 @@
           </a:p>
         </p:txBody>
       </p:sp>
+      <p:sp>
+        <p:nvSpPr>
+          <p:cNvPr id="24" name="ZoneTexte 23">
+            <a:extLst>
+              <a:ext uri="{FF2B5EF4-FFF2-40B4-BE49-F238E27FC236}">
+                <a16:creationId xmlns:a16="http://schemas.microsoft.com/office/drawing/2014/main" id="{0F2CAF3F-C2A2-4A9B-3251-DCBA48B45B3A}"/>
+              </a:ext>
+            </a:extLst>
+          </p:cNvPr>
+          <p:cNvSpPr txBox="1"/>
+          <p:nvPr/>
+        </p:nvSpPr>
+        <p:spPr>
+          <a:xfrm>
+            <a:off x="0" y="6578600"/>
+            <a:ext cx="12192000" cy="230832"/>
+          </a:xfrm>
+          <a:prstGeom prst="rect">
+            <a:avLst/>
+          </a:prstGeom>
+          <a:noFill/>
+        </p:spPr>
+        <p:txBody>
+          <a:bodyPr vert="horz" rtlCol="0">
+            <a:spAutoFit/>
+          </a:bodyPr>
+          <a:lstStyle/>
+          <a:p>
+            <a:pPr algn="ctr"/>
+            <a:r>
+              <a:rPr lang="fr-FR" sz="900">
+                <a:solidFill>
+                  <a:srgbClr val="B4B4B4"/>
+                </a:solidFill>
+              </a:rPr>
+              <a:t>(c) titi_23 - mediateur-numerique.github.io - Reproduction interdite sans autorisation</a:t>
+            </a:r>
+          </a:p>
+        </p:txBody>
+      </p:sp>
     </p:spTree>
   </p:cSld>
   <p:clrMapOvr>
@@ -21184,6 +21464,46 @@
           </a:p>
         </p:txBody>
       </p:sp>
+      <p:sp>
+        <p:nvSpPr>
+          <p:cNvPr id="24" name="ZoneTexte 23">
+            <a:extLst>
+              <a:ext uri="{FF2B5EF4-FFF2-40B4-BE49-F238E27FC236}">
+                <a16:creationId xmlns:a16="http://schemas.microsoft.com/office/drawing/2014/main" id="{34F906E2-F03B-430B-0ED1-A8637B594767}"/>
+              </a:ext>
+            </a:extLst>
+          </p:cNvPr>
+          <p:cNvSpPr txBox="1"/>
+          <p:nvPr/>
+        </p:nvSpPr>
+        <p:spPr>
+          <a:xfrm>
+            <a:off x="0" y="6578600"/>
+            <a:ext cx="12192000" cy="230832"/>
+          </a:xfrm>
+          <a:prstGeom prst="rect">
+            <a:avLst/>
+          </a:prstGeom>
+          <a:noFill/>
+        </p:spPr>
+        <p:txBody>
+          <a:bodyPr vert="horz" rtlCol="0">
+            <a:spAutoFit/>
+          </a:bodyPr>
+          <a:lstStyle/>
+          <a:p>
+            <a:pPr algn="ctr"/>
+            <a:r>
+              <a:rPr lang="fr-FR" sz="900">
+                <a:solidFill>
+                  <a:srgbClr val="B4B4B4"/>
+                </a:solidFill>
+              </a:rPr>
+              <a:t>(c) titi_23 - mediateur-numerique.github.io - Reproduction interdite sans autorisation</a:t>
+            </a:r>
+          </a:p>
+        </p:txBody>
+      </p:sp>
     </p:spTree>
   </p:cSld>
   <p:clrMapOvr>
@@ -21503,6 +21823,46 @@
               <a:t>Conseil : gardez cet accusé avec vos papiers</a:t>
             </a:r>
             <a:endParaRPr lang="en-US" sz="1250" dirty="0"/>
+          </a:p>
+        </p:txBody>
+      </p:sp>
+      <p:sp>
+        <p:nvSpPr>
+          <p:cNvPr id="11" name="ZoneTexte 10">
+            <a:extLst>
+              <a:ext uri="{FF2B5EF4-FFF2-40B4-BE49-F238E27FC236}">
+                <a16:creationId xmlns:a16="http://schemas.microsoft.com/office/drawing/2014/main" id="{95DC91C0-2CF8-F24B-7C4A-A89F3C5B9AAB}"/>
+              </a:ext>
+            </a:extLst>
+          </p:cNvPr>
+          <p:cNvSpPr txBox="1"/>
+          <p:nvPr/>
+        </p:nvSpPr>
+        <p:spPr>
+          <a:xfrm>
+            <a:off x="0" y="6578600"/>
+            <a:ext cx="12192000" cy="230832"/>
+          </a:xfrm>
+          <a:prstGeom prst="rect">
+            <a:avLst/>
+          </a:prstGeom>
+          <a:noFill/>
+        </p:spPr>
+        <p:txBody>
+          <a:bodyPr vert="horz" rtlCol="0">
+            <a:spAutoFit/>
+          </a:bodyPr>
+          <a:lstStyle/>
+          <a:p>
+            <a:pPr algn="ctr"/>
+            <a:r>
+              <a:rPr lang="fr-FR" sz="900">
+                <a:solidFill>
+                  <a:srgbClr val="B4B4B4"/>
+                </a:solidFill>
+              </a:rPr>
+              <a:t>(c) titi_23 - mediateur-numerique.github.io - Reproduction interdite sans autorisation</a:t>
+            </a:r>
           </a:p>
         </p:txBody>
       </p:sp>
@@ -22315,6 +22675,46 @@
           </a:p>
         </p:txBody>
       </p:sp>
+      <p:sp>
+        <p:nvSpPr>
+          <p:cNvPr id="26" name="ZoneTexte 25">
+            <a:extLst>
+              <a:ext uri="{FF2B5EF4-FFF2-40B4-BE49-F238E27FC236}">
+                <a16:creationId xmlns:a16="http://schemas.microsoft.com/office/drawing/2014/main" id="{72CF8E6C-D55A-65AD-23A5-E85F5AE7A983}"/>
+              </a:ext>
+            </a:extLst>
+          </p:cNvPr>
+          <p:cNvSpPr txBox="1"/>
+          <p:nvPr/>
+        </p:nvSpPr>
+        <p:spPr>
+          <a:xfrm>
+            <a:off x="0" y="6578600"/>
+            <a:ext cx="12192000" cy="230832"/>
+          </a:xfrm>
+          <a:prstGeom prst="rect">
+            <a:avLst/>
+          </a:prstGeom>
+          <a:noFill/>
+        </p:spPr>
+        <p:txBody>
+          <a:bodyPr vert="horz" rtlCol="0">
+            <a:spAutoFit/>
+          </a:bodyPr>
+          <a:lstStyle/>
+          <a:p>
+            <a:pPr algn="ctr"/>
+            <a:r>
+              <a:rPr lang="fr-FR" sz="900">
+                <a:solidFill>
+                  <a:srgbClr val="B4B4B4"/>
+                </a:solidFill>
+              </a:rPr>
+              <a:t>(c) titi_23 - mediateur-numerique.github.io - Reproduction interdite sans autorisation</a:t>
+            </a:r>
+          </a:p>
+        </p:txBody>
+      </p:sp>
     </p:spTree>
   </p:cSld>
   <p:clrMapOvr>
@@ -23170,6 +23570,46 @@
           </a:p>
         </p:txBody>
       </p:sp>
+      <p:sp>
+        <p:nvSpPr>
+          <p:cNvPr id="27" name="ZoneTexte 26">
+            <a:extLst>
+              <a:ext uri="{FF2B5EF4-FFF2-40B4-BE49-F238E27FC236}">
+                <a16:creationId xmlns:a16="http://schemas.microsoft.com/office/drawing/2014/main" id="{5BD54B69-3F16-1A97-AF70-B1876F63A5AA}"/>
+              </a:ext>
+            </a:extLst>
+          </p:cNvPr>
+          <p:cNvSpPr txBox="1"/>
+          <p:nvPr/>
+        </p:nvSpPr>
+        <p:spPr>
+          <a:xfrm>
+            <a:off x="0" y="6578600"/>
+            <a:ext cx="12192000" cy="230832"/>
+          </a:xfrm>
+          <a:prstGeom prst="rect">
+            <a:avLst/>
+          </a:prstGeom>
+          <a:noFill/>
+        </p:spPr>
+        <p:txBody>
+          <a:bodyPr vert="horz" rtlCol="0">
+            <a:spAutoFit/>
+          </a:bodyPr>
+          <a:lstStyle/>
+          <a:p>
+            <a:pPr algn="ctr"/>
+            <a:r>
+              <a:rPr lang="fr-FR" sz="900">
+                <a:solidFill>
+                  <a:srgbClr val="B4B4B4"/>
+                </a:solidFill>
+              </a:rPr>
+              <a:t>(c) titi_23 - mediateur-numerique.github.io - Reproduction interdite sans autorisation</a:t>
+            </a:r>
+          </a:p>
+        </p:txBody>
+      </p:sp>
     </p:spTree>
   </p:cSld>
   <p:clrMapOvr>
@@ -24091,6 +24531,46 @@
           </a:p>
         </p:txBody>
       </p:sp>
+      <p:sp>
+        <p:nvSpPr>
+          <p:cNvPr id="29" name="ZoneTexte 28">
+            <a:extLst>
+              <a:ext uri="{FF2B5EF4-FFF2-40B4-BE49-F238E27FC236}">
+                <a16:creationId xmlns:a16="http://schemas.microsoft.com/office/drawing/2014/main" id="{02E5FF01-C880-AC51-5641-20D988494C73}"/>
+              </a:ext>
+            </a:extLst>
+          </p:cNvPr>
+          <p:cNvSpPr txBox="1"/>
+          <p:nvPr/>
+        </p:nvSpPr>
+        <p:spPr>
+          <a:xfrm>
+            <a:off x="0" y="6578600"/>
+            <a:ext cx="12192000" cy="230832"/>
+          </a:xfrm>
+          <a:prstGeom prst="rect">
+            <a:avLst/>
+          </a:prstGeom>
+          <a:noFill/>
+        </p:spPr>
+        <p:txBody>
+          <a:bodyPr vert="horz" rtlCol="0">
+            <a:spAutoFit/>
+          </a:bodyPr>
+          <a:lstStyle/>
+          <a:p>
+            <a:pPr algn="ctr"/>
+            <a:r>
+              <a:rPr lang="fr-FR" sz="900">
+                <a:solidFill>
+                  <a:srgbClr val="B4B4B4"/>
+                </a:solidFill>
+              </a:rPr>
+              <a:t>(c) titi_23 - mediateur-numerique.github.io - Reproduction interdite sans autorisation</a:t>
+            </a:r>
+          </a:p>
+        </p:txBody>
+      </p:sp>
     </p:spTree>
   </p:cSld>
   <p:clrMapOvr>
@@ -24847,6 +25327,46 @@
           </a:p>
         </p:txBody>
       </p:sp>
+      <p:sp>
+        <p:nvSpPr>
+          <p:cNvPr id="24" name="ZoneTexte 23">
+            <a:extLst>
+              <a:ext uri="{FF2B5EF4-FFF2-40B4-BE49-F238E27FC236}">
+                <a16:creationId xmlns:a16="http://schemas.microsoft.com/office/drawing/2014/main" id="{AA0EF4F6-B853-1554-18CD-D061EB431D3A}"/>
+              </a:ext>
+            </a:extLst>
+          </p:cNvPr>
+          <p:cNvSpPr txBox="1"/>
+          <p:nvPr/>
+        </p:nvSpPr>
+        <p:spPr>
+          <a:xfrm>
+            <a:off x="0" y="6578600"/>
+            <a:ext cx="12192000" cy="230832"/>
+          </a:xfrm>
+          <a:prstGeom prst="rect">
+            <a:avLst/>
+          </a:prstGeom>
+          <a:noFill/>
+        </p:spPr>
+        <p:txBody>
+          <a:bodyPr vert="horz" rtlCol="0">
+            <a:spAutoFit/>
+          </a:bodyPr>
+          <a:lstStyle/>
+          <a:p>
+            <a:pPr algn="ctr"/>
+            <a:r>
+              <a:rPr lang="fr-FR" sz="900">
+                <a:solidFill>
+                  <a:srgbClr val="B4B4B4"/>
+                </a:solidFill>
+              </a:rPr>
+              <a:t>(c) titi_23 - mediateur-numerique.github.io - Reproduction interdite sans autorisation</a:t>
+            </a:r>
+          </a:p>
+        </p:txBody>
+      </p:sp>
     </p:spTree>
   </p:cSld>
   <p:clrMapOvr>
@@ -25928,6 +26448,46 @@
           </a:p>
         </p:txBody>
       </p:sp>
+      <p:sp>
+        <p:nvSpPr>
+          <p:cNvPr id="32" name="ZoneTexte 31">
+            <a:extLst>
+              <a:ext uri="{FF2B5EF4-FFF2-40B4-BE49-F238E27FC236}">
+                <a16:creationId xmlns:a16="http://schemas.microsoft.com/office/drawing/2014/main" id="{173A4641-0043-BF29-B983-03B943BBFD1E}"/>
+              </a:ext>
+            </a:extLst>
+          </p:cNvPr>
+          <p:cNvSpPr txBox="1"/>
+          <p:nvPr/>
+        </p:nvSpPr>
+        <p:spPr>
+          <a:xfrm>
+            <a:off x="0" y="6578600"/>
+            <a:ext cx="12192000" cy="230832"/>
+          </a:xfrm>
+          <a:prstGeom prst="rect">
+            <a:avLst/>
+          </a:prstGeom>
+          <a:noFill/>
+        </p:spPr>
+        <p:txBody>
+          <a:bodyPr vert="horz" rtlCol="0">
+            <a:spAutoFit/>
+          </a:bodyPr>
+          <a:lstStyle/>
+          <a:p>
+            <a:pPr algn="ctr"/>
+            <a:r>
+              <a:rPr lang="fr-FR" sz="900">
+                <a:solidFill>
+                  <a:srgbClr val="B4B4B4"/>
+                </a:solidFill>
+              </a:rPr>
+              <a:t>(c) titi_23 - mediateur-numerique.github.io - Reproduction interdite sans autorisation</a:t>
+            </a:r>
+          </a:p>
+        </p:txBody>
+      </p:sp>
     </p:spTree>
   </p:cSld>
   <p:clrMapOvr>
@@ -26810,6 +27370,46 @@
           </a:p>
         </p:txBody>
       </p:sp>
+      <p:sp>
+        <p:nvSpPr>
+          <p:cNvPr id="28" name="ZoneTexte 27">
+            <a:extLst>
+              <a:ext uri="{FF2B5EF4-FFF2-40B4-BE49-F238E27FC236}">
+                <a16:creationId xmlns:a16="http://schemas.microsoft.com/office/drawing/2014/main" id="{6E040A8C-FA9C-7437-9674-3B40FC9E3F78}"/>
+              </a:ext>
+            </a:extLst>
+          </p:cNvPr>
+          <p:cNvSpPr txBox="1"/>
+          <p:nvPr/>
+        </p:nvSpPr>
+        <p:spPr>
+          <a:xfrm>
+            <a:off x="0" y="6578600"/>
+            <a:ext cx="12192000" cy="230832"/>
+          </a:xfrm>
+          <a:prstGeom prst="rect">
+            <a:avLst/>
+          </a:prstGeom>
+          <a:noFill/>
+        </p:spPr>
+        <p:txBody>
+          <a:bodyPr vert="horz" rtlCol="0">
+            <a:spAutoFit/>
+          </a:bodyPr>
+          <a:lstStyle/>
+          <a:p>
+            <a:pPr algn="ctr"/>
+            <a:r>
+              <a:rPr lang="fr-FR" sz="900">
+                <a:solidFill>
+                  <a:srgbClr val="B4B4B4"/>
+                </a:solidFill>
+              </a:rPr>
+              <a:t>(c) titi_23 - mediateur-numerique.github.io - Reproduction interdite sans autorisation</a:t>
+            </a:r>
+          </a:p>
+        </p:txBody>
+      </p:sp>
     </p:spTree>
   </p:cSld>
   <p:clrMapOvr>
@@ -27692,6 +28292,46 @@
           </a:p>
         </p:txBody>
       </p:sp>
+      <p:sp>
+        <p:nvSpPr>
+          <p:cNvPr id="28" name="ZoneTexte 27">
+            <a:extLst>
+              <a:ext uri="{FF2B5EF4-FFF2-40B4-BE49-F238E27FC236}">
+                <a16:creationId xmlns:a16="http://schemas.microsoft.com/office/drawing/2014/main" id="{F646F9F6-AF7D-51FC-3E00-90EAE903F81E}"/>
+              </a:ext>
+            </a:extLst>
+          </p:cNvPr>
+          <p:cNvSpPr txBox="1"/>
+          <p:nvPr/>
+        </p:nvSpPr>
+        <p:spPr>
+          <a:xfrm>
+            <a:off x="0" y="6578600"/>
+            <a:ext cx="12192000" cy="230832"/>
+          </a:xfrm>
+          <a:prstGeom prst="rect">
+            <a:avLst/>
+          </a:prstGeom>
+          <a:noFill/>
+        </p:spPr>
+        <p:txBody>
+          <a:bodyPr vert="horz" rtlCol="0">
+            <a:spAutoFit/>
+          </a:bodyPr>
+          <a:lstStyle/>
+          <a:p>
+            <a:pPr algn="ctr"/>
+            <a:r>
+              <a:rPr lang="fr-FR" sz="900">
+                <a:solidFill>
+                  <a:srgbClr val="B4B4B4"/>
+                </a:solidFill>
+              </a:rPr>
+              <a:t>(c) titi_23 - mediateur-numerique.github.io - Reproduction interdite sans autorisation</a:t>
+            </a:r>
+          </a:p>
+        </p:txBody>
+      </p:sp>
     </p:spTree>
   </p:cSld>
   <p:clrMapOvr>
@@ -29042,6 +29682,46 @@
           </a:p>
         </p:txBody>
       </p:sp>
+      <p:sp>
+        <p:nvSpPr>
+          <p:cNvPr id="40" name="ZoneTexte 39">
+            <a:extLst>
+              <a:ext uri="{FF2B5EF4-FFF2-40B4-BE49-F238E27FC236}">
+                <a16:creationId xmlns:a16="http://schemas.microsoft.com/office/drawing/2014/main" id="{54F2F2C0-F3F1-1D8C-6803-2A8FAA876C45}"/>
+              </a:ext>
+            </a:extLst>
+          </p:cNvPr>
+          <p:cNvSpPr txBox="1"/>
+          <p:nvPr/>
+        </p:nvSpPr>
+        <p:spPr>
+          <a:xfrm>
+            <a:off x="0" y="6578600"/>
+            <a:ext cx="12192000" cy="230832"/>
+          </a:xfrm>
+          <a:prstGeom prst="rect">
+            <a:avLst/>
+          </a:prstGeom>
+          <a:noFill/>
+        </p:spPr>
+        <p:txBody>
+          <a:bodyPr vert="horz" rtlCol="0">
+            <a:spAutoFit/>
+          </a:bodyPr>
+          <a:lstStyle/>
+          <a:p>
+            <a:pPr algn="ctr"/>
+            <a:r>
+              <a:rPr lang="fr-FR" sz="900">
+                <a:solidFill>
+                  <a:srgbClr val="B4B4B4"/>
+                </a:solidFill>
+              </a:rPr>
+              <a:t>(c) titi_23 - mediateur-numerique.github.io - Reproduction interdite sans autorisation</a:t>
+            </a:r>
+          </a:p>
+        </p:txBody>
+      </p:sp>
     </p:spTree>
   </p:cSld>
   <p:clrMapOvr>
@@ -29384,6 +30064,46 @@
               <a:t>Guide réutilisable — les dates indiquées sont des repères, vérifiez les dates exactes de l'année en cours.</a:t>
             </a:r>
             <a:endParaRPr lang="en-US" sz="1100" dirty="0"/>
+          </a:p>
+        </p:txBody>
+      </p:sp>
+      <p:sp>
+        <p:nvSpPr>
+          <p:cNvPr id="11" name="ZoneTexte 10">
+            <a:extLst>
+              <a:ext uri="{FF2B5EF4-FFF2-40B4-BE49-F238E27FC236}">
+                <a16:creationId xmlns:a16="http://schemas.microsoft.com/office/drawing/2014/main" id="{B383B831-41E4-C5BC-1417-D64EB7CD1540}"/>
+              </a:ext>
+            </a:extLst>
+          </p:cNvPr>
+          <p:cNvSpPr txBox="1"/>
+          <p:nvPr/>
+        </p:nvSpPr>
+        <p:spPr>
+          <a:xfrm>
+            <a:off x="0" y="6578600"/>
+            <a:ext cx="12192000" cy="230832"/>
+          </a:xfrm>
+          <a:prstGeom prst="rect">
+            <a:avLst/>
+          </a:prstGeom>
+          <a:noFill/>
+        </p:spPr>
+        <p:txBody>
+          <a:bodyPr vert="horz" rtlCol="0">
+            <a:spAutoFit/>
+          </a:bodyPr>
+          <a:lstStyle/>
+          <a:p>
+            <a:pPr algn="ctr"/>
+            <a:r>
+              <a:rPr lang="fr-FR" sz="900">
+                <a:solidFill>
+                  <a:srgbClr val="B4B4B4"/>
+                </a:solidFill>
+              </a:rPr>
+              <a:t>(c) titi_23 - mediateur-numerique.github.io - Reproduction interdite sans autorisation</a:t>
+            </a:r>
           </a:p>
         </p:txBody>
       </p:sp>
@@ -30028,6 +30748,46 @@
           </a:p>
         </p:txBody>
       </p:sp>
+      <p:sp>
+        <p:nvSpPr>
+          <p:cNvPr id="19" name="ZoneTexte 18">
+            <a:extLst>
+              <a:ext uri="{FF2B5EF4-FFF2-40B4-BE49-F238E27FC236}">
+                <a16:creationId xmlns:a16="http://schemas.microsoft.com/office/drawing/2014/main" id="{0CA532C1-DB20-A6A5-BBBB-01EBC2D0F540}"/>
+              </a:ext>
+            </a:extLst>
+          </p:cNvPr>
+          <p:cNvSpPr txBox="1"/>
+          <p:nvPr/>
+        </p:nvSpPr>
+        <p:spPr>
+          <a:xfrm>
+            <a:off x="0" y="6578600"/>
+            <a:ext cx="12192000" cy="230832"/>
+          </a:xfrm>
+          <a:prstGeom prst="rect">
+            <a:avLst/>
+          </a:prstGeom>
+          <a:noFill/>
+        </p:spPr>
+        <p:txBody>
+          <a:bodyPr vert="horz" rtlCol="0">
+            <a:spAutoFit/>
+          </a:bodyPr>
+          <a:lstStyle/>
+          <a:p>
+            <a:pPr algn="ctr"/>
+            <a:r>
+              <a:rPr lang="fr-FR" sz="900">
+                <a:solidFill>
+                  <a:srgbClr val="B4B4B4"/>
+                </a:solidFill>
+              </a:rPr>
+              <a:t>(c) titi_23 - mediateur-numerique.github.io - Reproduction interdite sans autorisation</a:t>
+            </a:r>
+          </a:p>
+        </p:txBody>
+      </p:sp>
     </p:spTree>
   </p:cSld>
   <p:clrMapOvr>
@@ -31156,6 +31916,46 @@
           </a:p>
         </p:txBody>
       </p:sp>
+      <p:sp>
+        <p:nvSpPr>
+          <p:cNvPr id="34" name="ZoneTexte 33">
+            <a:extLst>
+              <a:ext uri="{FF2B5EF4-FFF2-40B4-BE49-F238E27FC236}">
+                <a16:creationId xmlns:a16="http://schemas.microsoft.com/office/drawing/2014/main" id="{690E631C-DCE0-8828-D21C-13E45E1348CD}"/>
+              </a:ext>
+            </a:extLst>
+          </p:cNvPr>
+          <p:cNvSpPr txBox="1"/>
+          <p:nvPr/>
+        </p:nvSpPr>
+        <p:spPr>
+          <a:xfrm>
+            <a:off x="0" y="6578600"/>
+            <a:ext cx="12192000" cy="230832"/>
+          </a:xfrm>
+          <a:prstGeom prst="rect">
+            <a:avLst/>
+          </a:prstGeom>
+          <a:noFill/>
+        </p:spPr>
+        <p:txBody>
+          <a:bodyPr vert="horz" rtlCol="0">
+            <a:spAutoFit/>
+          </a:bodyPr>
+          <a:lstStyle/>
+          <a:p>
+            <a:pPr algn="ctr"/>
+            <a:r>
+              <a:rPr lang="fr-FR" sz="900">
+                <a:solidFill>
+                  <a:srgbClr val="B4B4B4"/>
+                </a:solidFill>
+              </a:rPr>
+              <a:t>(c) titi_23 - mediateur-numerique.github.io - Reproduction interdite sans autorisation</a:t>
+            </a:r>
+          </a:p>
+        </p:txBody>
+      </p:sp>
     </p:spTree>
   </p:cSld>
   <p:clrMapOvr>
@@ -32073,6 +32873,46 @@
           </a:p>
         </p:txBody>
       </p:sp>
+      <p:sp>
+        <p:nvSpPr>
+          <p:cNvPr id="27" name="ZoneTexte 26">
+            <a:extLst>
+              <a:ext uri="{FF2B5EF4-FFF2-40B4-BE49-F238E27FC236}">
+                <a16:creationId xmlns:a16="http://schemas.microsoft.com/office/drawing/2014/main" id="{EEAC8CFB-4A1D-BCCD-FAD4-0C244AA0389A}"/>
+              </a:ext>
+            </a:extLst>
+          </p:cNvPr>
+          <p:cNvSpPr txBox="1"/>
+          <p:nvPr/>
+        </p:nvSpPr>
+        <p:spPr>
+          <a:xfrm>
+            <a:off x="0" y="6578600"/>
+            <a:ext cx="12192000" cy="230832"/>
+          </a:xfrm>
+          <a:prstGeom prst="rect">
+            <a:avLst/>
+          </a:prstGeom>
+          <a:noFill/>
+        </p:spPr>
+        <p:txBody>
+          <a:bodyPr vert="horz" rtlCol="0">
+            <a:spAutoFit/>
+          </a:bodyPr>
+          <a:lstStyle/>
+          <a:p>
+            <a:pPr algn="ctr"/>
+            <a:r>
+              <a:rPr lang="fr-FR" sz="900">
+                <a:solidFill>
+                  <a:srgbClr val="B4B4B4"/>
+                </a:solidFill>
+              </a:rPr>
+              <a:t>(c) titi_23 - mediateur-numerique.github.io - Reproduction interdite sans autorisation</a:t>
+            </a:r>
+          </a:p>
+        </p:txBody>
+      </p:sp>
     </p:spTree>
   </p:cSld>
   <p:clrMapOvr>
@@ -32680,6 +33520,46 @@
           </a:p>
         </p:txBody>
       </p:sp>
+      <p:sp>
+        <p:nvSpPr>
+          <p:cNvPr id="17" name="ZoneTexte 16">
+            <a:extLst>
+              <a:ext uri="{FF2B5EF4-FFF2-40B4-BE49-F238E27FC236}">
+                <a16:creationId xmlns:a16="http://schemas.microsoft.com/office/drawing/2014/main" id="{9BD5FEEB-585C-D4F9-9C0E-44806D2448AA}"/>
+              </a:ext>
+            </a:extLst>
+          </p:cNvPr>
+          <p:cNvSpPr txBox="1"/>
+          <p:nvPr/>
+        </p:nvSpPr>
+        <p:spPr>
+          <a:xfrm>
+            <a:off x="0" y="6578600"/>
+            <a:ext cx="12192000" cy="230832"/>
+          </a:xfrm>
+          <a:prstGeom prst="rect">
+            <a:avLst/>
+          </a:prstGeom>
+          <a:noFill/>
+        </p:spPr>
+        <p:txBody>
+          <a:bodyPr vert="horz" rtlCol="0">
+            <a:spAutoFit/>
+          </a:bodyPr>
+          <a:lstStyle/>
+          <a:p>
+            <a:pPr algn="ctr"/>
+            <a:r>
+              <a:rPr lang="fr-FR" sz="900">
+                <a:solidFill>
+                  <a:srgbClr val="B4B4B4"/>
+                </a:solidFill>
+              </a:rPr>
+              <a:t>(c) titi_23 - mediateur-numerique.github.io - Reproduction interdite sans autorisation</a:t>
+            </a:r>
+          </a:p>
+        </p:txBody>
+      </p:sp>
     </p:spTree>
   </p:cSld>
   <p:clrMapOvr>
@@ -33184,6 +34064,46 @@
           </a:p>
         </p:txBody>
       </p:sp>
+      <p:sp>
+        <p:nvSpPr>
+          <p:cNvPr id="15" name="ZoneTexte 14">
+            <a:extLst>
+              <a:ext uri="{FF2B5EF4-FFF2-40B4-BE49-F238E27FC236}">
+                <a16:creationId xmlns:a16="http://schemas.microsoft.com/office/drawing/2014/main" id="{0F806684-CE55-7079-F4BA-576A94737827}"/>
+              </a:ext>
+            </a:extLst>
+          </p:cNvPr>
+          <p:cNvSpPr txBox="1"/>
+          <p:nvPr/>
+        </p:nvSpPr>
+        <p:spPr>
+          <a:xfrm>
+            <a:off x="0" y="6578600"/>
+            <a:ext cx="12192000" cy="230832"/>
+          </a:xfrm>
+          <a:prstGeom prst="rect">
+            <a:avLst/>
+          </a:prstGeom>
+          <a:noFill/>
+        </p:spPr>
+        <p:txBody>
+          <a:bodyPr vert="horz" rtlCol="0">
+            <a:spAutoFit/>
+          </a:bodyPr>
+          <a:lstStyle/>
+          <a:p>
+            <a:pPr algn="ctr"/>
+            <a:r>
+              <a:rPr lang="fr-FR" sz="900">
+                <a:solidFill>
+                  <a:srgbClr val="B4B4B4"/>
+                </a:solidFill>
+              </a:rPr>
+              <a:t>(c) titi_23 - mediateur-numerique.github.io - Reproduction interdite sans autorisation</a:t>
+            </a:r>
+          </a:p>
+        </p:txBody>
+      </p:sp>
     </p:spTree>
   </p:cSld>
   <p:clrMapOvr>
@@ -34187,6 +35107,46 @@
           </a:p>
         </p:txBody>
       </p:sp>
+      <p:sp>
+        <p:nvSpPr>
+          <p:cNvPr id="30" name="ZoneTexte 29">
+            <a:extLst>
+              <a:ext uri="{FF2B5EF4-FFF2-40B4-BE49-F238E27FC236}">
+                <a16:creationId xmlns:a16="http://schemas.microsoft.com/office/drawing/2014/main" id="{AB7DC858-8679-E9A3-5DDE-08655056BC02}"/>
+              </a:ext>
+            </a:extLst>
+          </p:cNvPr>
+          <p:cNvSpPr txBox="1"/>
+          <p:nvPr/>
+        </p:nvSpPr>
+        <p:spPr>
+          <a:xfrm>
+            <a:off x="0" y="6578600"/>
+            <a:ext cx="12192000" cy="230832"/>
+          </a:xfrm>
+          <a:prstGeom prst="rect">
+            <a:avLst/>
+          </a:prstGeom>
+          <a:noFill/>
+        </p:spPr>
+        <p:txBody>
+          <a:bodyPr vert="horz" rtlCol="0">
+            <a:spAutoFit/>
+          </a:bodyPr>
+          <a:lstStyle/>
+          <a:p>
+            <a:pPr algn="ctr"/>
+            <a:r>
+              <a:rPr lang="fr-FR" sz="900">
+                <a:solidFill>
+                  <a:srgbClr val="B4B4B4"/>
+                </a:solidFill>
+              </a:rPr>
+              <a:t>(c) titi_23 - mediateur-numerique.github.io - Reproduction interdite sans autorisation</a:t>
+            </a:r>
+          </a:p>
+        </p:txBody>
+      </p:sp>
     </p:spTree>
   </p:cSld>
   <p:clrMapOvr>
@@ -35196,6 +36156,46 @@
               <a:t>cliquez sur le bouton bleu « S'identifier avec FranceConnect », choisissez votre compte, et entrez ses identifiants habituels.</a:t>
             </a:r>
             <a:endParaRPr lang="en-US" sz="1500" dirty="0"/>
+          </a:p>
+        </p:txBody>
+      </p:sp>
+      <p:sp>
+        <p:nvSpPr>
+          <p:cNvPr id="31" name="ZoneTexte 30">
+            <a:extLst>
+              <a:ext uri="{FF2B5EF4-FFF2-40B4-BE49-F238E27FC236}">
+                <a16:creationId xmlns:a16="http://schemas.microsoft.com/office/drawing/2014/main" id="{887293F5-E87E-E680-7941-997A9052117F}"/>
+              </a:ext>
+            </a:extLst>
+          </p:cNvPr>
+          <p:cNvSpPr txBox="1"/>
+          <p:nvPr/>
+        </p:nvSpPr>
+        <p:spPr>
+          <a:xfrm>
+            <a:off x="0" y="6578600"/>
+            <a:ext cx="12192000" cy="230832"/>
+          </a:xfrm>
+          <a:prstGeom prst="rect">
+            <a:avLst/>
+          </a:prstGeom>
+          <a:noFill/>
+        </p:spPr>
+        <p:txBody>
+          <a:bodyPr vert="horz" rtlCol="0">
+            <a:spAutoFit/>
+          </a:bodyPr>
+          <a:lstStyle/>
+          <a:p>
+            <a:pPr algn="ctr"/>
+            <a:r>
+              <a:rPr lang="fr-FR" sz="900">
+                <a:solidFill>
+                  <a:srgbClr val="B4B4B4"/>
+                </a:solidFill>
+              </a:rPr>
+              <a:t>(c) titi_23 - mediateur-numerique.github.io - Reproduction interdite sans autorisation</a:t>
+            </a:r>
           </a:p>
         </p:txBody>
       </p:sp>
